--- a/EsercizioLez3.2.pptx
+++ b/EsercizioLez3.2.pptx
@@ -109,6 +109,11 @@
       </a:defRPr>
     </a:lvl9pPr>
   </p:defaultTextStyle>
+  <p:extLst>
+    <p:ext uri="{EFAFB233-063F-42B5-8137-9DF3F51BA10A}">
+      <p15:sldGuideLst xmlns:p15="http://schemas.microsoft.com/office/powerpoint/2012/main"/>
+    </p:ext>
+  </p:extLst>
 </p:presentation>
 </file>
 
@@ -116,8 +121,8 @@
 <pc:chgInfo xmlns:a="http://schemas.openxmlformats.org/drawingml/2006/main" xmlns:r="http://schemas.openxmlformats.org/officeDocument/2006/relationships" xmlns:ac="http://schemas.microsoft.com/office/drawing/2013/main/command" xmlns:pc="http://schemas.microsoft.com/office/powerpoint/2013/main/command">
   <pc:docChgLst>
     <pc:chgData name="Alessandro Di Piazza" userId="242384fd-1746-4b70-8d90-c83f4330e5ed" providerId="ADAL" clId="{FFF1DA74-BEAE-470B-8D8A-B7A1F3E1BF85}"/>
-    <pc:docChg chg="undo custSel addSld modSld">
-      <pc:chgData name="Alessandro Di Piazza" userId="242384fd-1746-4b70-8d90-c83f4330e5ed" providerId="ADAL" clId="{FFF1DA74-BEAE-470B-8D8A-B7A1F3E1BF85}" dt="2026-05-29T14:18:50.077" v="40"/>
+    <pc:docChg chg="undo custSel addSld delSld modSld sldOrd">
+      <pc:chgData name="Alessandro Di Piazza" userId="242384fd-1746-4b70-8d90-c83f4330e5ed" providerId="ADAL" clId="{FFF1DA74-BEAE-470B-8D8A-B7A1F3E1BF85}" dt="2026-06-03T12:08:54.848" v="90" actId="2696"/>
       <pc:docMkLst>
         <pc:docMk/>
       </pc:docMkLst>
@@ -129,7 +134,7 @@
         </pc:sldMkLst>
       </pc:sldChg>
       <pc:sldChg chg="addSp delSp modSp new mod">
-        <pc:chgData name="Alessandro Di Piazza" userId="242384fd-1746-4b70-8d90-c83f4330e5ed" providerId="ADAL" clId="{FFF1DA74-BEAE-470B-8D8A-B7A1F3E1BF85}" dt="2026-05-29T14:17:25.202" v="16" actId="5793"/>
+        <pc:chgData name="Alessandro Di Piazza" userId="242384fd-1746-4b70-8d90-c83f4330e5ed" providerId="ADAL" clId="{FFF1DA74-BEAE-470B-8D8A-B7A1F3E1BF85}" dt="2026-06-03T08:03:47.886" v="43" actId="1076"/>
         <pc:sldMkLst>
           <pc:docMk/>
           <pc:sldMk cId="1849798557" sldId="259"/>
@@ -143,19 +148,11 @@
           </ac:spMkLst>
         </pc:spChg>
         <pc:spChg chg="mod">
-          <ac:chgData name="Alessandro Di Piazza" userId="242384fd-1746-4b70-8d90-c83f4330e5ed" providerId="ADAL" clId="{FFF1DA74-BEAE-470B-8D8A-B7A1F3E1BF85}" dt="2026-05-29T14:17:25.202" v="16" actId="5793"/>
+          <ac:chgData name="Alessandro Di Piazza" userId="242384fd-1746-4b70-8d90-c83f4330e5ed" providerId="ADAL" clId="{FFF1DA74-BEAE-470B-8D8A-B7A1F3E1BF85}" dt="2026-06-03T08:03:47.886" v="43" actId="1076"/>
           <ac:spMkLst>
             <pc:docMk/>
             <pc:sldMk cId="1849798557" sldId="259"/>
             <ac:spMk id="3" creationId="{8C77AC92-9F11-6E10-67D3-DB23BF6BC799}"/>
-          </ac:spMkLst>
-        </pc:spChg>
-        <pc:spChg chg="add del">
-          <ac:chgData name="Alessandro Di Piazza" userId="242384fd-1746-4b70-8d90-c83f4330e5ed" providerId="ADAL" clId="{FFF1DA74-BEAE-470B-8D8A-B7A1F3E1BF85}" dt="2026-05-29T14:17:04.284" v="3" actId="22"/>
-          <ac:spMkLst>
-            <pc:docMk/>
-            <pc:sldMk cId="1849798557" sldId="259"/>
-            <ac:spMk id="5" creationId="{AEB8D7F3-A810-71C2-C4BD-370EC6661F93}"/>
           </ac:spMkLst>
         </pc:spChg>
       </pc:sldChg>
@@ -229,7 +226,7 @@
         </pc:spChg>
       </pc:sldChg>
       <pc:sldChg chg="modSp new mod">
-        <pc:chgData name="Alessandro Di Piazza" userId="242384fd-1746-4b70-8d90-c83f4330e5ed" providerId="ADAL" clId="{FFF1DA74-BEAE-470B-8D8A-B7A1F3E1BF85}" dt="2026-05-29T14:18:50.077" v="40"/>
+        <pc:chgData name="Alessandro Di Piazza" userId="242384fd-1746-4b70-8d90-c83f4330e5ed" providerId="ADAL" clId="{FFF1DA74-BEAE-470B-8D8A-B7A1F3E1BF85}" dt="2026-06-03T10:28:11.059" v="89" actId="5793"/>
         <pc:sldMkLst>
           <pc:docMk/>
           <pc:sldMk cId="3353320050" sldId="263"/>
@@ -243,11 +240,34 @@
           </ac:spMkLst>
         </pc:spChg>
         <pc:spChg chg="mod">
-          <ac:chgData name="Alessandro Di Piazza" userId="242384fd-1746-4b70-8d90-c83f4330e5ed" providerId="ADAL" clId="{FFF1DA74-BEAE-470B-8D8A-B7A1F3E1BF85}" dt="2026-05-29T14:18:33.430" v="36" actId="5793"/>
+          <ac:chgData name="Alessandro Di Piazza" userId="242384fd-1746-4b70-8d90-c83f4330e5ed" providerId="ADAL" clId="{FFF1DA74-BEAE-470B-8D8A-B7A1F3E1BF85}" dt="2026-06-03T10:28:11.059" v="89" actId="5793"/>
           <ac:spMkLst>
             <pc:docMk/>
             <pc:sldMk cId="3353320050" sldId="263"/>
             <ac:spMk id="3" creationId="{4D64840E-8324-1923-F38F-C1245C5C7BA5}"/>
+          </ac:spMkLst>
+        </pc:spChg>
+      </pc:sldChg>
+      <pc:sldChg chg="modSp new del mod ord">
+        <pc:chgData name="Alessandro Di Piazza" userId="242384fd-1746-4b70-8d90-c83f4330e5ed" providerId="ADAL" clId="{FFF1DA74-BEAE-470B-8D8A-B7A1F3E1BF85}" dt="2026-06-03T12:08:54.848" v="90" actId="2696"/>
+        <pc:sldMkLst>
+          <pc:docMk/>
+          <pc:sldMk cId="2583142868" sldId="264"/>
+        </pc:sldMkLst>
+        <pc:spChg chg="mod">
+          <ac:chgData name="Alessandro Di Piazza" userId="242384fd-1746-4b70-8d90-c83f4330e5ed" providerId="ADAL" clId="{FFF1DA74-BEAE-470B-8D8A-B7A1F3E1BF85}" dt="2026-06-03T08:42:31.523" v="53" actId="20577"/>
+          <ac:spMkLst>
+            <pc:docMk/>
+            <pc:sldMk cId="2583142868" sldId="264"/>
+            <ac:spMk id="2" creationId="{F9DD02FE-F6AD-FEC5-AC3F-7EB581158341}"/>
+          </ac:spMkLst>
+        </pc:spChg>
+        <pc:spChg chg="mod">
+          <ac:chgData name="Alessandro Di Piazza" userId="242384fd-1746-4b70-8d90-c83f4330e5ed" providerId="ADAL" clId="{FFF1DA74-BEAE-470B-8D8A-B7A1F3E1BF85}" dt="2026-06-03T08:42:36.583" v="87" actId="20577"/>
+          <ac:spMkLst>
+            <pc:docMk/>
+            <pc:sldMk cId="2583142868" sldId="264"/>
+            <ac:spMk id="3" creationId="{9B33038E-7AB3-548C-64F2-A669111EEBB6}"/>
           </ac:spMkLst>
         </pc:spChg>
       </pc:sldChg>
@@ -403,7 +423,7 @@
           <a:p>
             <a:fld id="{430AA10E-60DE-425E-9672-249D6F3097C7}" type="datetimeFigureOut">
               <a:rPr lang="en-US" smtClean="0"/>
-              <a:t>5/29/2026</a:t>
+              <a:t>6/3/2026</a:t>
             </a:fld>
             <a:endParaRPr lang="en-US"/>
           </a:p>
@@ -601,7 +621,7 @@
           <a:p>
             <a:fld id="{430AA10E-60DE-425E-9672-249D6F3097C7}" type="datetimeFigureOut">
               <a:rPr lang="en-US" smtClean="0"/>
-              <a:t>5/29/2026</a:t>
+              <a:t>6/3/2026</a:t>
             </a:fld>
             <a:endParaRPr lang="en-US"/>
           </a:p>
@@ -809,7 +829,7 @@
           <a:p>
             <a:fld id="{430AA10E-60DE-425E-9672-249D6F3097C7}" type="datetimeFigureOut">
               <a:rPr lang="en-US" smtClean="0"/>
-              <a:t>5/29/2026</a:t>
+              <a:t>6/3/2026</a:t>
             </a:fld>
             <a:endParaRPr lang="en-US"/>
           </a:p>
@@ -1007,7 +1027,7 @@
           <a:p>
             <a:fld id="{430AA10E-60DE-425E-9672-249D6F3097C7}" type="datetimeFigureOut">
               <a:rPr lang="en-US" smtClean="0"/>
-              <a:t>5/29/2026</a:t>
+              <a:t>6/3/2026</a:t>
             </a:fld>
             <a:endParaRPr lang="en-US"/>
           </a:p>
@@ -1282,7 +1302,7 @@
           <a:p>
             <a:fld id="{430AA10E-60DE-425E-9672-249D6F3097C7}" type="datetimeFigureOut">
               <a:rPr lang="en-US" smtClean="0"/>
-              <a:t>5/29/2026</a:t>
+              <a:t>6/3/2026</a:t>
             </a:fld>
             <a:endParaRPr lang="en-US"/>
           </a:p>
@@ -1547,7 +1567,7 @@
           <a:p>
             <a:fld id="{430AA10E-60DE-425E-9672-249D6F3097C7}" type="datetimeFigureOut">
               <a:rPr lang="en-US" smtClean="0"/>
-              <a:t>5/29/2026</a:t>
+              <a:t>6/3/2026</a:t>
             </a:fld>
             <a:endParaRPr lang="en-US"/>
           </a:p>
@@ -1959,7 +1979,7 @@
           <a:p>
             <a:fld id="{430AA10E-60DE-425E-9672-249D6F3097C7}" type="datetimeFigureOut">
               <a:rPr lang="en-US" smtClean="0"/>
-              <a:t>5/29/2026</a:t>
+              <a:t>6/3/2026</a:t>
             </a:fld>
             <a:endParaRPr lang="en-US"/>
           </a:p>
@@ -2100,7 +2120,7 @@
           <a:p>
             <a:fld id="{430AA10E-60DE-425E-9672-249D6F3097C7}" type="datetimeFigureOut">
               <a:rPr lang="en-US" smtClean="0"/>
-              <a:t>5/29/2026</a:t>
+              <a:t>6/3/2026</a:t>
             </a:fld>
             <a:endParaRPr lang="en-US"/>
           </a:p>
@@ -2213,7 +2233,7 @@
           <a:p>
             <a:fld id="{430AA10E-60DE-425E-9672-249D6F3097C7}" type="datetimeFigureOut">
               <a:rPr lang="en-US" smtClean="0"/>
-              <a:t>5/29/2026</a:t>
+              <a:t>6/3/2026</a:t>
             </a:fld>
             <a:endParaRPr lang="en-US"/>
           </a:p>
@@ -2524,7 +2544,7 @@
           <a:p>
             <a:fld id="{430AA10E-60DE-425E-9672-249D6F3097C7}" type="datetimeFigureOut">
               <a:rPr lang="en-US" smtClean="0"/>
-              <a:t>5/29/2026</a:t>
+              <a:t>6/3/2026</a:t>
             </a:fld>
             <a:endParaRPr lang="en-US"/>
           </a:p>
@@ -2812,7 +2832,7 @@
           <a:p>
             <a:fld id="{430AA10E-60DE-425E-9672-249D6F3097C7}" type="datetimeFigureOut">
               <a:rPr lang="en-US" smtClean="0"/>
-              <a:t>5/29/2026</a:t>
+              <a:t>6/3/2026</a:t>
             </a:fld>
             <a:endParaRPr lang="en-US"/>
           </a:p>
@@ -3053,7 +3073,7 @@
           <a:p>
             <a:fld id="{430AA10E-60DE-425E-9672-249D6F3097C7}" type="datetimeFigureOut">
               <a:rPr lang="en-US" smtClean="0"/>
-              <a:t>5/29/2026</a:t>
+              <a:t>6/3/2026</a:t>
             </a:fld>
             <a:endParaRPr lang="en-US"/>
           </a:p>
@@ -3660,7 +3680,12 @@
             <p:ph idx="1"/>
           </p:nvPr>
         </p:nvSpPr>
-        <p:spPr/>
+        <p:spPr>
+          <a:xfrm>
+            <a:off x="838200" y="1852520"/>
+            <a:ext cx="10515600" cy="4351338"/>
+          </a:xfrm>
+        </p:spPr>
         <p:txBody>
           <a:bodyPr>
             <a:normAutofit fontScale="55000" lnSpcReduction="20000"/>
@@ -3698,24 +3723,36 @@
               <a:buNone/>
             </a:pPr>
             <a:r>
-              <a:rPr lang="it-IT" dirty="0"/>
+              <a:rPr lang="it-IT" dirty="0">
+                <a:latin typeface="Consolas" panose="020B0609020204030204" pitchFamily="49" charset="0"/>
+              </a:rPr>
               <a:t>import pandas as pd</a:t>
             </a:r>
             <a:br>
-              <a:rPr lang="it-IT" dirty="0"/>
+              <a:rPr lang="it-IT" dirty="0">
+                <a:latin typeface="Consolas" panose="020B0609020204030204" pitchFamily="49" charset="0"/>
+              </a:rPr>
             </a:br>
             <a:br>
-              <a:rPr lang="it-IT" dirty="0"/>
+              <a:rPr lang="it-IT" dirty="0">
+                <a:latin typeface="Consolas" panose="020B0609020204030204" pitchFamily="49" charset="0"/>
+              </a:rPr>
             </a:br>
             <a:r>
-              <a:rPr lang="it-IT" dirty="0"/>
+              <a:rPr lang="it-IT" dirty="0">
+                <a:latin typeface="Consolas" panose="020B0609020204030204" pitchFamily="49" charset="0"/>
+              </a:rPr>
               <a:t>url = "https://raw.githubusercontent.com/datasciencedojo/datasets/master/titanic.csv"</a:t>
             </a:r>
             <a:br>
-              <a:rPr lang="it-IT" dirty="0"/>
+              <a:rPr lang="it-IT" dirty="0">
+                <a:latin typeface="Consolas" panose="020B0609020204030204" pitchFamily="49" charset="0"/>
+              </a:rPr>
             </a:br>
             <a:r>
-              <a:rPr lang="it-IT" dirty="0"/>
+              <a:rPr lang="it-IT" dirty="0">
+                <a:latin typeface="Consolas" panose="020B0609020204030204" pitchFamily="49" charset="0"/>
+              </a:rPr>
               <a:t>df = pd.read_csv(url)</a:t>
             </a:r>
           </a:p>
@@ -4257,6 +4294,9 @@
             </a:r>
           </a:p>
           <a:p>
+            <a:pPr marL="0" indent="0">
+              <a:buNone/>
+            </a:pPr>
             <a:r>
               <a:rPr lang="it-IT" dirty="0"/>
               <a:t>df["IsAdult"] = df["Age"] &gt;= 18</a:t>
@@ -4269,6 +4309,9 @@
             </a:r>
           </a:p>
           <a:p>
+            <a:pPr marL="0" indent="0">
+              <a:buNone/>
+            </a:pPr>
             <a:r>
               <a:rPr lang="it-IT" dirty="0"/>
               <a:t>df.to_csv("titanic_modified.csv", index=False)</a:t>
